--- a/classes/parte-12-osint-e-ingenieria-social/260-opsec-personal-y-anonimato/clase-260-presentacion.pptx
+++ b/classes/parte-12-osint-e-ingenieria-social/260-opsec-personal-y-anonimato/clase-260-presentacion.pptx
@@ -18,6 +18,10 @@
     <p:sldId id="266" r:id="rId17"/>
     <p:sldId id="267" r:id="rId18"/>
     <p:sldId id="268" r:id="rId19"/>
+    <p:sldId id="269" r:id="rId20"/>
+    <p:sldId id="270" r:id="rId21"/>
+    <p:sldId id="271" r:id="rId22"/>
+    <p:sldId id="272" r:id="rId23"/>
   </p:sldIdLst>
   <p:sldSz cx="9144000" cy="6858000" type="screen4x3"/>
   <p:notesSz cx="6858000" cy="9144000"/>
@@ -3199,7 +3203,7 @@
                   <a:srgbClr val="0B3D2E"/>
                 </a:solidFill>
               </a:rPr>
-              <a:t>📝 Reto verificable</a:t>
+              <a:t>🧰 Herramientas y preparación</a:t>
             </a:r>
           </a:p>
         </p:txBody>
@@ -3237,67 +3241,67 @@
                   <a:srgbClr val="22282E"/>
                 </a:solidFill>
               </a:rPr>
-              <a:t>•  Entrega un plan de OPSEC personal con: modelo de amenaza, esquema de compartimentación, lista de</a:t>
-            </a:r>
-          </a:p>
-          <a:p>
-            <a:pPr>
-              <a:spcAft>
-                <a:spcPts val="600"/>
-              </a:spcAft>
-            </a:pPr>
-            <a:r>
-              <a:rPr sz="1500">
-                <a:solidFill>
-                  <a:srgbClr val="22282E"/>
-                </a:solidFill>
-              </a:rPr>
-              <a:t>•  acciones de reducción de huella ejecutadas y una evaluación honesta de límites y riesgos residuales.</a:t>
-            </a:r>
-          </a:p>
-          <a:p>
-            <a:pPr>
-              <a:spcAft>
-                <a:spcPts val="600"/>
-              </a:spcAft>
-            </a:pPr>
-            <a:r>
-              <a:rPr sz="1500">
-                <a:solidFill>
-                  <a:srgbClr val="22282E"/>
-                </a:solidFill>
-              </a:rPr>
-              <a:t>•  Criterio de aceptación: el plan demuestra al menos tres acciones reales completadas (correos</a:t>
-            </a:r>
-          </a:p>
-          <a:p>
-            <a:pPr>
-              <a:spcAft>
-                <a:spcPts val="600"/>
-              </a:spcAft>
-            </a:pPr>
-            <a:r>
-              <a:rPr sz="1500">
-                <a:solidFill>
-                  <a:srgbClr val="22282E"/>
-                </a:solidFill>
-              </a:rPr>
-              <a:t>•  segregados, eliminación de una exposición, uso verificado de Tor/Tails) y reconoce explícitamente qué</a:t>
-            </a:r>
-          </a:p>
-          <a:p>
-            <a:pPr>
-              <a:spcAft>
-                <a:spcPts val="600"/>
-              </a:spcAft>
-            </a:pPr>
-            <a:r>
-              <a:rPr sz="1500">
-                <a:solidFill>
-                  <a:srgbClr val="22282E"/>
-                </a:solidFill>
-              </a:rPr>
-              <a:t>•  no puede garantizar el anonimato.</a:t>
+              <a:t>•  Tor Browser y, para trabajo sensible, Tails (USB amnésico).</a:t>
+            </a:r>
+          </a:p>
+          <a:p>
+            <a:pPr>
+              <a:spcAft>
+                <a:spcPts val="600"/>
+              </a:spcAft>
+            </a:pPr>
+            <a:r>
+              <a:rPr sz="1500">
+                <a:solidFill>
+                  <a:srgbClr val="22282E"/>
+                </a:solidFill>
+              </a:rPr>
+              <a:t>•  VPN de confianza con política de no-logs auditada (complemento, no sustituto de Tor).</a:t>
+            </a:r>
+          </a:p>
+          <a:p>
+            <a:pPr>
+              <a:spcAft>
+                <a:spcPts val="600"/>
+              </a:spcAft>
+            </a:pPr>
+            <a:r>
+              <a:rPr sz="1500">
+                <a:solidFill>
+                  <a:srgbClr val="22282E"/>
+                </a:solidFill>
+              </a:rPr>
+              <a:t>•  Gestor de identidades: correos segregados (alias/relays), gestor de contraseñas, números virtuales.</a:t>
+            </a:r>
+          </a:p>
+          <a:p>
+            <a:pPr>
+              <a:spcAft>
+                <a:spcPts val="600"/>
+              </a:spcAft>
+            </a:pPr>
+            <a:r>
+              <a:rPr sz="1500">
+                <a:solidFill>
+                  <a:srgbClr val="22282E"/>
+                </a:solidFill>
+              </a:rPr>
+              <a:t>•  Limpieza de metadatos: exiftool, mat2.</a:t>
+            </a:r>
+          </a:p>
+          <a:p>
+            <a:pPr>
+              <a:spcAft>
+                <a:spcPts val="600"/>
+              </a:spcAft>
+            </a:pPr>
+            <a:r>
+              <a:rPr sz="1500">
+                <a:solidFill>
+                  <a:srgbClr val="22282E"/>
+                </a:solidFill>
+              </a:rPr>
+              <a:t>•  Recordatorio: herramienta ≠ anonimato; la OPSEC se rompe por comportamiento (reutilizar alias, mezclar cuentas).</a:t>
             </a:r>
           </a:p>
         </p:txBody>
@@ -3348,7 +3352,7 @@
                   <a:srgbClr val="0B3D2E"/>
                 </a:solidFill>
               </a:rPr>
-              <a:t>⚠️ Errores comunes</a:t>
+              <a:t>🧪 Laboratorio guiado (sobre ti mismo)</a:t>
             </a:r>
           </a:p>
         </p:txBody>
@@ -3386,67 +3390,97 @@
                   <a:srgbClr val="22282E"/>
                 </a:solidFill>
               </a:rPr>
-              <a:t>•  Deanonimizado pese a usar Tor — Te logueaste en una cuenta personal. Nunca mezcles identidad real y anónima.</a:t>
-            </a:r>
-          </a:p>
-          <a:p>
-            <a:pPr>
-              <a:spcAft>
-                <a:spcPts val="600"/>
-              </a:spcAft>
-            </a:pPr>
-            <a:r>
-              <a:rPr sz="1500">
-                <a:solidFill>
-                  <a:srgbClr val="22282E"/>
-                </a:solidFill>
-              </a:rPr>
-              <a:t>•  VPN "no-logs" que sí registraba — Confianza mal puesta. Elige proveedores auditados; recuerda que la VPN te ve.</a:t>
-            </a:r>
-          </a:p>
-          <a:p>
-            <a:pPr>
-              <a:spcAft>
-                <a:spcPts val="600"/>
-              </a:spcAft>
-            </a:pPr>
-            <a:r>
-              <a:rPr sz="1500">
-                <a:solidFill>
-                  <a:srgbClr val="22282E"/>
-                </a:solidFill>
-              </a:rPr>
-              <a:t>•  Alias reutilizado enlaza identidades — Falta de compartimentación. Un alias por identidad, sin cruces.</a:t>
-            </a:r>
-          </a:p>
-          <a:p>
-            <a:pPr>
-              <a:spcAft>
-                <a:spcPts val="600"/>
-              </a:spcAft>
-            </a:pPr>
-            <a:r>
-              <a:rPr sz="1500">
-                <a:solidFill>
-                  <a:srgbClr val="22282E"/>
-                </a:solidFill>
-              </a:rPr>
-              <a:t>•  Metadatos delatan al autor — No se limpiaron. Usa mat2/exiftool antes de publicar.</a:t>
-            </a:r>
-          </a:p>
-          <a:p>
-            <a:pPr>
-              <a:spcAft>
-                <a:spcPts val="600"/>
-              </a:spcAft>
-            </a:pPr>
-            <a:r>
-              <a:rPr sz="1500">
-                <a:solidFill>
-                  <a:srgbClr val="22282E"/>
-                </a:solidFill>
-              </a:rPr>
-              <a:t>•  Patrón horario revela zona/rutina — Hábitos predecibles. Varía y minimiza señales de "pattern of life".</a:t>
+              <a:t>•  Redacta tu modelo de amenaza: qué activos proteges, posibles adversarios y su capacidad.</a:t>
+            </a:r>
+          </a:p>
+          <a:p>
+            <a:pPr>
+              <a:spcAft>
+                <a:spcPts val="600"/>
+              </a:spcAft>
+            </a:pPr>
+            <a:r>
+              <a:rPr sz="1500">
+                <a:solidFill>
+                  <a:srgbClr val="22282E"/>
+                </a:solidFill>
+              </a:rPr>
+              <a:t>•  Diseña un esquema de compartimentación: identidad personal, profesional y de investigación separadas.</a:t>
+            </a:r>
+          </a:p>
+          <a:p>
+            <a:pPr>
+              <a:spcAft>
+                <a:spcPts val="600"/>
+              </a:spcAft>
+            </a:pPr>
+            <a:r>
+              <a:rPr sz="1500">
+                <a:solidFill>
+                  <a:srgbClr val="22282E"/>
+                </a:solidFill>
+              </a:rPr>
+              <a:t>•  Audita tu huella (reutiliza la Clase 249) y crea una lista de solicitudes de eliminación a servicios/brokers.</a:t>
+            </a:r>
+          </a:p>
+          <a:p>
+            <a:pPr>
+              <a:spcAft>
+                <a:spcPts val="600"/>
+              </a:spcAft>
+            </a:pPr>
+            <a:r>
+              <a:rPr sz="1500">
+                <a:solidFill>
+                  <a:srgbClr val="22282E"/>
+                </a:solidFill>
+              </a:rPr>
+              <a:t>•  Crea correos segregados con relays/alias y contraseñas únicas por identidad.</a:t>
+            </a:r>
+          </a:p>
+          <a:p>
+            <a:pPr>
+              <a:spcAft>
+                <a:spcPts val="600"/>
+              </a:spcAft>
+            </a:pPr>
+            <a:r>
+              <a:rPr sz="1500">
+                <a:solidFill>
+                  <a:srgbClr val="22282E"/>
+                </a:solidFill>
+              </a:rPr>
+              <a:t>•  Instala Tor Browser y comprueba tu IP en un servicio de "what is my IP" antes y después.</a:t>
+            </a:r>
+          </a:p>
+          <a:p>
+            <a:pPr>
+              <a:spcAft>
+                <a:spcPts val="600"/>
+              </a:spcAft>
+            </a:pPr>
+            <a:r>
+              <a:rPr sz="1500">
+                <a:solidFill>
+                  <a:srgbClr val="22282E"/>
+                </a:solidFill>
+              </a:rPr>
+              <a:t>•  Prepara un USB de Tails y arráncalo en una VM/equipo de prueba; verifica que no deja rastros.</a:t>
+            </a:r>
+          </a:p>
+          <a:p>
+            <a:pPr>
+              <a:spcAft>
+                <a:spcPts val="600"/>
+              </a:spcAft>
+            </a:pPr>
+            <a:r>
+              <a:rPr sz="1500">
+                <a:solidFill>
+                  <a:srgbClr val="22282E"/>
+                </a:solidFill>
+              </a:rPr>
+              <a:t>•  Limpia metadatos de un documento con mat2 archivo.pdf y compara antes/después.</a:t>
             </a:r>
           </a:p>
         </p:txBody>
@@ -3497,7 +3531,7 @@
                   <a:srgbClr val="0B3D2E"/>
                 </a:solidFill>
               </a:rPr>
-              <a:t>❓ Preguntas frecuentes</a:t>
+              <a:t>✍️ Ejercicios</a:t>
             </a:r>
           </a:p>
         </p:txBody>
@@ -3535,97 +3569,82 @@
                   <a:srgbClr val="22282E"/>
                 </a:solidFill>
               </a:rPr>
-              <a:t>•  ❓ ¿Tor me hace 100% anónimo?</a:t>
-            </a:r>
-          </a:p>
-          <a:p>
-            <a:pPr>
-              <a:spcAft>
-                <a:spcPts val="600"/>
-              </a:spcAft>
-            </a:pPr>
-            <a:r>
-              <a:rPr sz="1500">
-                <a:solidFill>
-                  <a:srgbClr val="22282E"/>
-                </a:solidFill>
-              </a:rPr>
-              <a:t>•  No. Oculta tu IP, pero el anonimato se rompe por errores de comportamiento, JavaScript, correlación de</a:t>
-            </a:r>
-          </a:p>
-          <a:p>
-            <a:pPr>
-              <a:spcAft>
-                <a:spcPts val="600"/>
-              </a:spcAft>
-            </a:pPr>
-            <a:r>
-              <a:rPr sz="1500">
-                <a:solidFill>
-                  <a:srgbClr val="22282E"/>
-                </a:solidFill>
-              </a:rPr>
-              <a:t>•  tráfico o iniciar sesión en cuentas identificables.</a:t>
-            </a:r>
-          </a:p>
-          <a:p>
-            <a:pPr>
-              <a:spcAft>
-                <a:spcPts val="600"/>
-              </a:spcAft>
-            </a:pPr>
-            <a:r>
-              <a:rPr sz="1500">
-                <a:solidFill>
-                  <a:srgbClr val="22282E"/>
-                </a:solidFill>
-              </a:rPr>
-              <a:t>•  ❓ ¿VPN o Tor?</a:t>
-            </a:r>
-          </a:p>
-          <a:p>
-            <a:pPr>
-              <a:spcAft>
-                <a:spcPts val="600"/>
-              </a:spcAft>
-            </a:pPr>
-            <a:r>
-              <a:rPr sz="1500">
-                <a:solidFill>
-                  <a:srgbClr val="22282E"/>
-                </a:solidFill>
-              </a:rPr>
-              <a:t>•  Distintos objetivos: la VPN cambia en quién confías (el proveedor te ve); Tor distribuye la confianza.</a:t>
-            </a:r>
-          </a:p>
-          <a:p>
-            <a:pPr>
-              <a:spcAft>
-                <a:spcPts val="600"/>
-              </a:spcAft>
-            </a:pPr>
-            <a:r>
-              <a:rPr sz="1500">
-                <a:solidFill>
-                  <a:srgbClr val="22282E"/>
-                </a:solidFill>
-              </a:rPr>
-              <a:t>•  Para anonimato fuerte, Tor/Tails; la VPN es un complemento, no un anonimizador por sí sola.</a:t>
-            </a:r>
-          </a:p>
-          <a:p>
-            <a:pPr>
-              <a:spcAft>
-                <a:spcPts val="600"/>
-              </a:spcAft>
-            </a:pPr>
-            <a:r>
-              <a:rPr sz="1500">
-                <a:solidFill>
-                  <a:srgbClr val="22282E"/>
-                </a:solidFill>
-              </a:rPr>
-              <a:t>•  ❓ ¿Puedo borrar mi huella por completo?</a:t>
+              <a:t>•  Escribe tu modelo de amenaza en una página, con adversarios y esfuerzo estimado.</a:t>
+            </a:r>
+          </a:p>
+          <a:p>
+            <a:pPr>
+              <a:spcAft>
+                <a:spcPts val="600"/>
+              </a:spcAft>
+            </a:pPr>
+            <a:r>
+              <a:rPr sz="1500">
+                <a:solidFill>
+                  <a:srgbClr val="22282E"/>
+                </a:solidFill>
+              </a:rPr>
+              <a:t>•  Explica un error típico que anula el anonimato de Tor (p. ej. loguearte en tu cuenta real).</a:t>
+            </a:r>
+          </a:p>
+          <a:p>
+            <a:pPr>
+              <a:spcAft>
+                <a:spcPts val="600"/>
+              </a:spcAft>
+            </a:pPr>
+            <a:r>
+              <a:rPr sz="1500">
+                <a:solidFill>
+                  <a:srgbClr val="22282E"/>
+                </a:solidFill>
+              </a:rPr>
+              <a:t>•  Compara Tor vs. VPN vs. Tor sobre VPN y cuándo usar cada uno.</a:t>
+            </a:r>
+          </a:p>
+          <a:p>
+            <a:pPr>
+              <a:spcAft>
+                <a:spcPts val="600"/>
+              </a:spcAft>
+            </a:pPr>
+            <a:r>
+              <a:rPr sz="1500">
+                <a:solidFill>
+                  <a:srgbClr val="22282E"/>
+                </a:solidFill>
+              </a:rPr>
+              <a:t>•  Diseña un esquema de tres identidades compartimentadas con reglas de no-cruce.</a:t>
+            </a:r>
+          </a:p>
+          <a:p>
+            <a:pPr>
+              <a:spcAft>
+                <a:spcPts val="600"/>
+              </a:spcAft>
+            </a:pPr>
+            <a:r>
+              <a:rPr sz="1500">
+                <a:solidFill>
+                  <a:srgbClr val="22282E"/>
+                </a:solidFill>
+              </a:rPr>
+              <a:t>•  Redacta 5 solicitudes de eliminación a data brokers de tu región.</a:t>
+            </a:r>
+          </a:p>
+          <a:p>
+            <a:pPr>
+              <a:spcAft>
+                <a:spcPts val="600"/>
+              </a:spcAft>
+            </a:pPr>
+            <a:r>
+              <a:rPr sz="1500">
+                <a:solidFill>
+                  <a:srgbClr val="22282E"/>
+                </a:solidFill>
+              </a:rPr>
+              <a:t>•  Enumera 5 hábitos que rompen la OPSEC aunque uses buenas herramientas.</a:t>
             </a:r>
           </a:p>
         </p:txBody>
@@ -3676,7 +3695,7 @@
                   <a:srgbClr val="0B3D2E"/>
                 </a:solidFill>
               </a:rPr>
-              <a:t>🔗 Referencias</a:t>
+              <a:t>📝 Reto verificable</a:t>
             </a:r>
           </a:p>
         </p:txBody>
@@ -3714,6 +3733,483 @@
                   <a:srgbClr val="22282E"/>
                 </a:solidFill>
               </a:rPr>
+              <a:t>•  Entrega un plan de OPSEC personal con: modelo de amenaza, esquema de compartimentación, lista de</a:t>
+            </a:r>
+          </a:p>
+          <a:p>
+            <a:pPr>
+              <a:spcAft>
+                <a:spcPts val="600"/>
+              </a:spcAft>
+            </a:pPr>
+            <a:r>
+              <a:rPr sz="1500">
+                <a:solidFill>
+                  <a:srgbClr val="22282E"/>
+                </a:solidFill>
+              </a:rPr>
+              <a:t>•  acciones de reducción de huella ejecutadas y una evaluación honesta de límites y riesgos residuales.</a:t>
+            </a:r>
+          </a:p>
+          <a:p>
+            <a:pPr>
+              <a:spcAft>
+                <a:spcPts val="600"/>
+              </a:spcAft>
+            </a:pPr>
+            <a:r>
+              <a:rPr sz="1500">
+                <a:solidFill>
+                  <a:srgbClr val="22282E"/>
+                </a:solidFill>
+              </a:rPr>
+              <a:t>•  Criterio de aceptación: el plan demuestra al menos tres acciones reales completadas (correos</a:t>
+            </a:r>
+          </a:p>
+          <a:p>
+            <a:pPr>
+              <a:spcAft>
+                <a:spcPts val="600"/>
+              </a:spcAft>
+            </a:pPr>
+            <a:r>
+              <a:rPr sz="1500">
+                <a:solidFill>
+                  <a:srgbClr val="22282E"/>
+                </a:solidFill>
+              </a:rPr>
+              <a:t>•  segregados, eliminación de una exposición, uso verificado de Tor/Tails) y reconoce explícitamente qué</a:t>
+            </a:r>
+          </a:p>
+          <a:p>
+            <a:pPr>
+              <a:spcAft>
+                <a:spcPts val="600"/>
+              </a:spcAft>
+            </a:pPr>
+            <a:r>
+              <a:rPr sz="1500">
+                <a:solidFill>
+                  <a:srgbClr val="22282E"/>
+                </a:solidFill>
+              </a:rPr>
+              <a:t>•  no puede garantizar el anonimato.</a:t>
+            </a:r>
+          </a:p>
+        </p:txBody>
+      </p:sp>
+    </p:spTree>
+  </p:cSld>
+  <p:clrMapOvr>
+    <a:masterClrMapping/>
+  </p:clrMapOvr>
+</p:sld>
+</file>
+
+<file path=ppt/slides/slide14.xml><?xml version="1.0" encoding="utf-8"?>
+<p:sld xmlns:a="http://schemas.openxmlformats.org/drawingml/2006/main" xmlns:p="http://schemas.openxmlformats.org/presentationml/2006/main" xmlns:r="http://schemas.openxmlformats.org/officeDocument/2006/relationships">
+  <p:cSld>
+    <p:spTree>
+      <p:nvGrpSpPr>
+        <p:cNvPr id="1" name=""/>
+        <p:cNvGrpSpPr/>
+        <p:nvPr/>
+      </p:nvGrpSpPr>
+      <p:grpSpPr/>
+      <p:sp>
+        <p:nvSpPr>
+          <p:cNvPr id="2" name="TextBox 1"/>
+          <p:cNvSpPr txBox="1"/>
+          <p:nvPr/>
+        </p:nvSpPr>
+        <p:spPr>
+          <a:xfrm>
+            <a:off x="457200" y="320040"/>
+            <a:ext cx="8229600" cy="822960"/>
+          </a:xfrm>
+          <a:prstGeom prst="rect">
+            <a:avLst/>
+          </a:prstGeom>
+          <a:noFill/>
+        </p:spPr>
+        <p:txBody>
+          <a:bodyPr wrap="square">
+            <a:spAutoFit/>
+          </a:bodyPr>
+          <a:lstStyle/>
+          <a:p>
+            <a:r>
+              <a:rPr sz="2600" b="1">
+                <a:solidFill>
+                  <a:srgbClr val="0B3D2E"/>
+                </a:solidFill>
+              </a:rPr>
+              <a:t>⚠️ Errores comunes</a:t>
+            </a:r>
+          </a:p>
+        </p:txBody>
+      </p:sp>
+      <p:sp>
+        <p:nvSpPr>
+          <p:cNvPr id="3" name="TextBox 2"/>
+          <p:cNvSpPr txBox="1"/>
+          <p:nvPr/>
+        </p:nvSpPr>
+        <p:spPr>
+          <a:xfrm>
+            <a:off x="457200" y="1280160"/>
+            <a:ext cx="8229600" cy="4937760"/>
+          </a:xfrm>
+          <a:prstGeom prst="rect">
+            <a:avLst/>
+          </a:prstGeom>
+          <a:noFill/>
+        </p:spPr>
+        <p:txBody>
+          <a:bodyPr wrap="square">
+            <a:spAutoFit/>
+          </a:bodyPr>
+          <a:lstStyle/>
+          <a:p>
+            <a:pPr>
+              <a:spcAft>
+                <a:spcPts val="600"/>
+              </a:spcAft>
+            </a:pPr>
+            <a:r>
+              <a:rPr sz="1500">
+                <a:solidFill>
+                  <a:srgbClr val="22282E"/>
+                </a:solidFill>
+              </a:rPr>
+              <a:t>•  Deanonimizado pese a usar Tor — Te logueaste en una cuenta personal. Nunca mezcles identidad real y anónima.</a:t>
+            </a:r>
+          </a:p>
+          <a:p>
+            <a:pPr>
+              <a:spcAft>
+                <a:spcPts val="600"/>
+              </a:spcAft>
+            </a:pPr>
+            <a:r>
+              <a:rPr sz="1500">
+                <a:solidFill>
+                  <a:srgbClr val="22282E"/>
+                </a:solidFill>
+              </a:rPr>
+              <a:t>•  VPN "no-logs" que sí registraba — Confianza mal puesta. Elige proveedores auditados; recuerda que la VPN te ve.</a:t>
+            </a:r>
+          </a:p>
+          <a:p>
+            <a:pPr>
+              <a:spcAft>
+                <a:spcPts val="600"/>
+              </a:spcAft>
+            </a:pPr>
+            <a:r>
+              <a:rPr sz="1500">
+                <a:solidFill>
+                  <a:srgbClr val="22282E"/>
+                </a:solidFill>
+              </a:rPr>
+              <a:t>•  Alias reutilizado enlaza identidades — Falta de compartimentación. Un alias por identidad, sin cruces.</a:t>
+            </a:r>
+          </a:p>
+          <a:p>
+            <a:pPr>
+              <a:spcAft>
+                <a:spcPts val="600"/>
+              </a:spcAft>
+            </a:pPr>
+            <a:r>
+              <a:rPr sz="1500">
+                <a:solidFill>
+                  <a:srgbClr val="22282E"/>
+                </a:solidFill>
+              </a:rPr>
+              <a:t>•  Metadatos delatan al autor — No se limpiaron. Usa mat2/exiftool antes de publicar.</a:t>
+            </a:r>
+          </a:p>
+          <a:p>
+            <a:pPr>
+              <a:spcAft>
+                <a:spcPts val="600"/>
+              </a:spcAft>
+            </a:pPr>
+            <a:r>
+              <a:rPr sz="1500">
+                <a:solidFill>
+                  <a:srgbClr val="22282E"/>
+                </a:solidFill>
+              </a:rPr>
+              <a:t>•  Patrón horario revela zona/rutina — Hábitos predecibles. Varía y minimiza señales de "pattern of life".</a:t>
+            </a:r>
+          </a:p>
+        </p:txBody>
+      </p:sp>
+    </p:spTree>
+  </p:cSld>
+  <p:clrMapOvr>
+    <a:masterClrMapping/>
+  </p:clrMapOvr>
+</p:sld>
+</file>
+
+<file path=ppt/slides/slide15.xml><?xml version="1.0" encoding="utf-8"?>
+<p:sld xmlns:a="http://schemas.openxmlformats.org/drawingml/2006/main" xmlns:p="http://schemas.openxmlformats.org/presentationml/2006/main" xmlns:r="http://schemas.openxmlformats.org/officeDocument/2006/relationships">
+  <p:cSld>
+    <p:spTree>
+      <p:nvGrpSpPr>
+        <p:cNvPr id="1" name=""/>
+        <p:cNvGrpSpPr/>
+        <p:nvPr/>
+      </p:nvGrpSpPr>
+      <p:grpSpPr/>
+      <p:sp>
+        <p:nvSpPr>
+          <p:cNvPr id="2" name="TextBox 1"/>
+          <p:cNvSpPr txBox="1"/>
+          <p:nvPr/>
+        </p:nvSpPr>
+        <p:spPr>
+          <a:xfrm>
+            <a:off x="457200" y="320040"/>
+            <a:ext cx="8229600" cy="822960"/>
+          </a:xfrm>
+          <a:prstGeom prst="rect">
+            <a:avLst/>
+          </a:prstGeom>
+          <a:noFill/>
+        </p:spPr>
+        <p:txBody>
+          <a:bodyPr wrap="square">
+            <a:spAutoFit/>
+          </a:bodyPr>
+          <a:lstStyle/>
+          <a:p>
+            <a:r>
+              <a:rPr sz="2600" b="1">
+                <a:solidFill>
+                  <a:srgbClr val="0B3D2E"/>
+                </a:solidFill>
+              </a:rPr>
+              <a:t>❓ Preguntas frecuentes</a:t>
+            </a:r>
+          </a:p>
+        </p:txBody>
+      </p:sp>
+      <p:sp>
+        <p:nvSpPr>
+          <p:cNvPr id="3" name="TextBox 2"/>
+          <p:cNvSpPr txBox="1"/>
+          <p:nvPr/>
+        </p:nvSpPr>
+        <p:spPr>
+          <a:xfrm>
+            <a:off x="457200" y="1280160"/>
+            <a:ext cx="8229600" cy="4937760"/>
+          </a:xfrm>
+          <a:prstGeom prst="rect">
+            <a:avLst/>
+          </a:prstGeom>
+          <a:noFill/>
+        </p:spPr>
+        <p:txBody>
+          <a:bodyPr wrap="square">
+            <a:spAutoFit/>
+          </a:bodyPr>
+          <a:lstStyle/>
+          <a:p>
+            <a:pPr>
+              <a:spcAft>
+                <a:spcPts val="600"/>
+              </a:spcAft>
+            </a:pPr>
+            <a:r>
+              <a:rPr sz="1500">
+                <a:solidFill>
+                  <a:srgbClr val="22282E"/>
+                </a:solidFill>
+              </a:rPr>
+              <a:t>•  ❓ ¿Tor me hace 100% anónimo?</a:t>
+            </a:r>
+          </a:p>
+          <a:p>
+            <a:pPr>
+              <a:spcAft>
+                <a:spcPts val="600"/>
+              </a:spcAft>
+            </a:pPr>
+            <a:r>
+              <a:rPr sz="1500">
+                <a:solidFill>
+                  <a:srgbClr val="22282E"/>
+                </a:solidFill>
+              </a:rPr>
+              <a:t>•  No. Tor puede impedir que el destino vea directamente la dirección de origen y distribuye el circuito, pero el anonimato depende también del adversario, endpoint, navegador, cuentas, contenido y…</a:t>
+            </a:r>
+          </a:p>
+          <a:p>
+            <a:pPr>
+              <a:spcAft>
+                <a:spcPts val="600"/>
+              </a:spcAft>
+            </a:pPr>
+            <a:r>
+              <a:rPr sz="1500">
+                <a:solidFill>
+                  <a:srgbClr val="22282E"/>
+                </a:solidFill>
+              </a:rPr>
+              <a:t>•  ❓ ¿VPN o Tor?</a:t>
+            </a:r>
+          </a:p>
+          <a:p>
+            <a:pPr>
+              <a:spcAft>
+                <a:spcPts val="600"/>
+              </a:spcAft>
+            </a:pPr>
+            <a:r>
+              <a:rPr sz="1500">
+                <a:solidFill>
+                  <a:srgbClr val="22282E"/>
+                </a:solidFill>
+              </a:rPr>
+              <a:t>•  Responden a modelos distintos. Una VPN traslada observación y confianza al proveedor; Tor distribuye el circuito y Tor Browser reduce algunas formas de enlace. Ninguna opción garantiza «anonimato…</a:t>
+            </a:r>
+          </a:p>
+          <a:p>
+            <a:pPr>
+              <a:spcAft>
+                <a:spcPts val="600"/>
+              </a:spcAft>
+            </a:pPr>
+            <a:r>
+              <a:rPr sz="1500">
+                <a:solidFill>
+                  <a:srgbClr val="22282E"/>
+                </a:solidFill>
+              </a:rPr>
+              <a:t>•  ❓ ¿Puedo borrar mi huella por completo?</a:t>
+            </a:r>
+          </a:p>
+          <a:p>
+            <a:pPr>
+              <a:spcAft>
+                <a:spcPts val="600"/>
+              </a:spcAft>
+            </a:pPr>
+            <a:r>
+              <a:rPr sz="1500">
+                <a:solidFill>
+                  <a:srgbClr val="22282E"/>
+                </a:solidFill>
+              </a:rPr>
+              <a:t>•  Casi nunca del todo. Puedes reducirla mucho con minimización, eliminación en brokers y buena OPSEC,</a:t>
+            </a:r>
+          </a:p>
+          <a:p>
+            <a:pPr>
+              <a:spcAft>
+                <a:spcPts val="600"/>
+              </a:spcAft>
+            </a:pPr>
+            <a:r>
+              <a:rPr sz="1500">
+                <a:solidFill>
+                  <a:srgbClr val="22282E"/>
+                </a:solidFill>
+              </a:rPr>
+              <a:t>•  pero asume un residuo y protégete en consecuencia.</a:t>
+            </a:r>
+          </a:p>
+        </p:txBody>
+      </p:sp>
+    </p:spTree>
+  </p:cSld>
+  <p:clrMapOvr>
+    <a:masterClrMapping/>
+  </p:clrMapOvr>
+</p:sld>
+</file>
+
+<file path=ppt/slides/slide16.xml><?xml version="1.0" encoding="utf-8"?>
+<p:sld xmlns:a="http://schemas.openxmlformats.org/drawingml/2006/main" xmlns:p="http://schemas.openxmlformats.org/presentationml/2006/main" xmlns:r="http://schemas.openxmlformats.org/officeDocument/2006/relationships">
+  <p:cSld>
+    <p:spTree>
+      <p:nvGrpSpPr>
+        <p:cNvPr id="1" name=""/>
+        <p:cNvGrpSpPr/>
+        <p:nvPr/>
+      </p:nvGrpSpPr>
+      <p:grpSpPr/>
+      <p:sp>
+        <p:nvSpPr>
+          <p:cNvPr id="2" name="TextBox 1"/>
+          <p:cNvSpPr txBox="1"/>
+          <p:nvPr/>
+        </p:nvSpPr>
+        <p:spPr>
+          <a:xfrm>
+            <a:off x="457200" y="320040"/>
+            <a:ext cx="8229600" cy="822960"/>
+          </a:xfrm>
+          <a:prstGeom prst="rect">
+            <a:avLst/>
+          </a:prstGeom>
+          <a:noFill/>
+        </p:spPr>
+        <p:txBody>
+          <a:bodyPr wrap="square">
+            <a:spAutoFit/>
+          </a:bodyPr>
+          <a:lstStyle/>
+          <a:p>
+            <a:r>
+              <a:rPr sz="2600" b="1">
+                <a:solidFill>
+                  <a:srgbClr val="0B3D2E"/>
+                </a:solidFill>
+              </a:rPr>
+              <a:t>🔗 Referencias</a:t>
+            </a:r>
+          </a:p>
+        </p:txBody>
+      </p:sp>
+      <p:sp>
+        <p:nvSpPr>
+          <p:cNvPr id="3" name="TextBox 2"/>
+          <p:cNvSpPr txBox="1"/>
+          <p:nvPr/>
+        </p:nvSpPr>
+        <p:spPr>
+          <a:xfrm>
+            <a:off x="457200" y="1280160"/>
+            <a:ext cx="8229600" cy="4937760"/>
+          </a:xfrm>
+          <a:prstGeom prst="rect">
+            <a:avLst/>
+          </a:prstGeom>
+          <a:noFill/>
+        </p:spPr>
+        <p:txBody>
+          <a:bodyPr wrap="square">
+            <a:spAutoFit/>
+          </a:bodyPr>
+          <a:lstStyle/>
+          <a:p>
+            <a:pPr>
+              <a:spcAft>
+                <a:spcPts val="600"/>
+              </a:spcAft>
+            </a:pPr>
+            <a:r>
+              <a:rPr sz="1500">
+                <a:solidFill>
+                  <a:srgbClr val="22282E"/>
+                </a:solidFill>
+              </a:rPr>
               <a:t>•  Bazzell, M. Extreme Privacy: What It Takes to Disappear. &lt;https://inteltechniques.com/book7.html&gt;</a:t>
             </a:r>
           </a:p>
@@ -3779,6 +4275,81 @@
           </a:p>
         </p:txBody>
       </p:sp>
+    </p:spTree>
+  </p:cSld>
+  <p:clrMapOvr>
+    <a:masterClrMapping/>
+  </p:clrMapOvr>
+</p:sld>
+</file>
+
+<file path=ppt/slides/slide17.xml><?xml version="1.0" encoding="utf-8"?>
+<p:sld xmlns:a="http://schemas.openxmlformats.org/drawingml/2006/main" xmlns:p="http://schemas.openxmlformats.org/presentationml/2006/main" xmlns:r="http://schemas.openxmlformats.org/officeDocument/2006/relationships">
+  <p:cSld>
+    <p:spTree>
+      <p:nvGrpSpPr>
+        <p:cNvPr id="1" name=""/>
+        <p:cNvGrpSpPr/>
+        <p:nvPr/>
+      </p:nvGrpSpPr>
+      <p:grpSpPr/>
+      <p:sp>
+        <p:nvSpPr>
+          <p:cNvPr id="2" name="TextBox 1"/>
+          <p:cNvSpPr txBox="1"/>
+          <p:nvPr/>
+        </p:nvSpPr>
+        <p:spPr>
+          <a:xfrm>
+            <a:off x="457200" y="274320"/>
+            <a:ext cx="8229600" cy="640080"/>
+          </a:xfrm>
+          <a:prstGeom prst="rect">
+            <a:avLst/>
+          </a:prstGeom>
+          <a:noFill/>
+        </p:spPr>
+        <p:txBody>
+          <a:bodyPr wrap="square">
+            <a:spAutoFit/>
+          </a:bodyPr>
+          <a:lstStyle/>
+          <a:p>
+            <a:r>
+              <a:rPr sz="2200" b="1">
+                <a:solidFill>
+                  <a:srgbClr val="0B3D2E"/>
+                </a:solidFill>
+              </a:rPr>
+              <a:t>Diagrama de la clase</a:t>
+            </a:r>
+          </a:p>
+        </p:txBody>
+      </p:sp>
+      <p:pic>
+        <p:nvPicPr>
+          <p:cNvPr id="3" name="Picture 2" descr="90927caee3753465.png"/>
+          <p:cNvPicPr>
+            <a:picLocks noChangeAspect="1"/>
+          </p:cNvPicPr>
+          <p:nvPr/>
+        </p:nvPicPr>
+        <p:blipFill>
+          <a:blip r:embed="rId2"/>
+          <a:stretch>
+            <a:fillRect/>
+          </a:stretch>
+        </p:blipFill>
+        <p:spPr>
+          <a:xfrm>
+            <a:off x="457200" y="3378708"/>
+            <a:ext cx="8229600" cy="740664"/>
+          </a:xfrm>
+          <a:prstGeom prst="rect">
+            <a:avLst/>
+          </a:prstGeom>
+        </p:spPr>
+      </p:pic>
     </p:spTree>
   </p:cSld>
   <p:clrMapOvr>
@@ -4421,7 +4992,7 @@
                   <a:srgbClr val="0B3D2E"/>
                 </a:solidFill>
               </a:rPr>
-              <a:t>📖 Definiciones y características</a:t>
+              <a:t>🧠 Explicación en profundidad</a:t>
             </a:r>
           </a:p>
         </p:txBody>
@@ -4459,97 +5030,82 @@
                   <a:srgbClr val="22282E"/>
                 </a:solidFill>
               </a:rPr>
-              <a:t>•  OPSEC: proceso de proteger información sensible identificando qué revelas y a quién. Característica: es disciplina continua, no una herramienta.</a:t>
-            </a:r>
-          </a:p>
-          <a:p>
-            <a:pPr>
-              <a:spcAft>
-                <a:spcPts val="600"/>
-              </a:spcAft>
-            </a:pPr>
-            <a:r>
-              <a:rPr sz="1500">
-                <a:solidFill>
-                  <a:srgbClr val="22282E"/>
-                </a:solidFill>
-              </a:rPr>
-              <a:t>•  Modelo de amenaza: análisis de qué proteges, de quién y con qué esfuerzo. Característica: sin él, la OPSEC es aleatoria.</a:t>
-            </a:r>
-          </a:p>
-          <a:p>
-            <a:pPr>
-              <a:spcAft>
-                <a:spcPts val="600"/>
-              </a:spcAft>
-            </a:pPr>
-            <a:r>
-              <a:rPr sz="1500">
-                <a:solidFill>
-                  <a:srgbClr val="22282E"/>
-                </a:solidFill>
-              </a:rPr>
-              <a:t>•  Compartimentación: separar identidades/actividades en silos. Característica: limita el daño de una filtración.</a:t>
-            </a:r>
-          </a:p>
-          <a:p>
-            <a:pPr>
-              <a:spcAft>
-                <a:spcPts val="600"/>
-              </a:spcAft>
-            </a:pPr>
-            <a:r>
-              <a:rPr sz="1500">
-                <a:solidFill>
-                  <a:srgbClr val="22282E"/>
-                </a:solidFill>
-              </a:rPr>
-              <a:t>•  Tor: red de anonimato por enrutamiento en capas. Característica: oculta la IP, pero no protege de errores de OPSEC del usuario.</a:t>
-            </a:r>
-          </a:p>
-          <a:p>
-            <a:pPr>
-              <a:spcAft>
-                <a:spcPts val="600"/>
-              </a:spcAft>
-            </a:pPr>
-            <a:r>
-              <a:rPr sz="1500">
-                <a:solidFill>
-                  <a:srgbClr val="22282E"/>
-                </a:solidFill>
-              </a:rPr>
-              <a:t>•  VPN: túnel cifrado hacia un proveedor. Característica: cambia la confianza, no elimina la atribución; el proveedor te ve.</a:t>
-            </a:r>
-          </a:p>
-          <a:p>
-            <a:pPr>
-              <a:spcAft>
-                <a:spcPts val="600"/>
-              </a:spcAft>
-            </a:pPr>
-            <a:r>
-              <a:rPr sz="1500">
-                <a:solidFill>
-                  <a:srgbClr val="22282E"/>
-                </a:solidFill>
-              </a:rPr>
-              <a:t>•  Tails: sistema live amnésico que enruta por Tor. Característica: no deja rastros en el equipo.</a:t>
-            </a:r>
-          </a:p>
-          <a:p>
-            <a:pPr>
-              <a:spcAft>
-                <a:spcPts val="600"/>
-              </a:spcAft>
-            </a:pPr>
-            <a:r>
-              <a:rPr sz="1500">
-                <a:solidFill>
-                  <a:srgbClr val="22282E"/>
-                </a:solidFill>
-              </a:rPr>
-              <a:t>•  Huella digital: conjunto de datos tuyos accesibles. Característica: se reduce, rara vez se elimina del todo.</a:t>
+              <a:t>•  OPSEC comienza con un modelo de amenaza: qué información dañaría al investigador o a terceros, qué adversario podría obtenerla, con qué capacidades y durante cuánto tiempo. Privacidad, seudonimato y…</a:t>
+            </a:r>
+          </a:p>
+          <a:p>
+            <a:pPr>
+              <a:spcAft>
+                <a:spcPts val="600"/>
+              </a:spcAft>
+            </a:pPr>
+            <a:r>
+              <a:rPr sz="1500">
+                <a:solidFill>
+                  <a:srgbClr val="22282E"/>
+                </a:solidFill>
+              </a:rPr>
+              <a:t>•  El diagrama destaca la correlación. Dirección IP, cookies, huella de navegador, correo de recuperación, estilo, zona horaria, pagos y contactos pueden unir compartimentos. La separación debe ser…</a:t>
+            </a:r>
+          </a:p>
+          <a:p>
+            <a:pPr>
+              <a:spcAft>
+                <a:spcPts val="600"/>
+              </a:spcAft>
+            </a:pPr>
+            <a:r>
+              <a:rPr sz="1500">
+                <a:solidFill>
+                  <a:srgbClr val="22282E"/>
+                </a:solidFill>
+              </a:rPr>
+              <a:t>•  En dispositivo se actualiza, cifra y limita software; en cuentas se usan credenciales únicas, recuperación protegida y autenticación resistente al phishing; en navegación se separan perfiles y se…</a:t>
+            </a:r>
+          </a:p>
+          <a:p>
+            <a:pPr>
+              <a:spcAft>
+                <a:spcPts val="600"/>
+              </a:spcAft>
+            </a:pPr>
+            <a:r>
+              <a:rPr sz="1500">
+                <a:solidFill>
+                  <a:srgbClr val="22282E"/>
+                </a:solidFill>
+              </a:rPr>
+              <a:t>•  Tor Browser está diseñado para reducir diferencias entre usuarios y enrutar tráfico mediante Tor. Instalar extensiones, cambiar configuraciones arbitrariamente o abrir documentos externos puede…</a:t>
+            </a:r>
+          </a:p>
+          <a:p>
+            <a:pPr>
+              <a:spcAft>
+                <a:spcPts val="600"/>
+              </a:spcAft>
+            </a:pPr>
+            <a:r>
+              <a:rPr sz="1500">
+                <a:solidFill>
+                  <a:srgbClr val="22282E"/>
+                </a:solidFill>
+              </a:rPr>
+              <a:t>•  La investigación puede exponer al analista a contenido traumático, acoso y doxxing. Se definen horarios, revisión por pares, apoyo y procedimiento ante amenaza. Publicar una captura puede revelar a…</a:t>
+            </a:r>
+          </a:p>
+          <a:p>
+            <a:pPr>
+              <a:spcAft>
+                <a:spcPts val="600"/>
+              </a:spcAft>
+            </a:pPr>
+            <a:r>
+              <a:rPr sz="1500">
+                <a:solidFill>
+                  <a:srgbClr val="22282E"/>
+                </a:solidFill>
+              </a:rPr>
+              <a:t>•  Una cuenta de investigación usa un alias distinto y Tor, pero registra el correo personal como recuperación y sube un PDF con nombre de autor. Dos capas de aplicación derrotan la separación de red.…</a:t>
             </a:r>
           </a:p>
         </p:txBody>
@@ -4600,7 +5156,7 @@
                   <a:srgbClr val="0B3D2E"/>
                 </a:solidFill>
               </a:rPr>
-              <a:t>🧰 Herramientas y preparación</a:t>
+              <a:t>📔 Glosario operativo</a:t>
             </a:r>
           </a:p>
         </p:txBody>
@@ -4638,67 +5194,82 @@
                   <a:srgbClr val="22282E"/>
                 </a:solidFill>
               </a:rPr>
-              <a:t>•  Tor Browser y, para trabajo sensible, Tails (USB amnésico).</a:t>
-            </a:r>
-          </a:p>
-          <a:p>
-            <a:pPr>
-              <a:spcAft>
-                <a:spcPts val="600"/>
-              </a:spcAft>
-            </a:pPr>
-            <a:r>
-              <a:rPr sz="1500">
-                <a:solidFill>
-                  <a:srgbClr val="22282E"/>
-                </a:solidFill>
-              </a:rPr>
-              <a:t>•  VPN de confianza con política de no-logs auditada (complemento, no sustituto de Tor).</a:t>
-            </a:r>
-          </a:p>
-          <a:p>
-            <a:pPr>
-              <a:spcAft>
-                <a:spcPts val="600"/>
-              </a:spcAft>
-            </a:pPr>
-            <a:r>
-              <a:rPr sz="1500">
-                <a:solidFill>
-                  <a:srgbClr val="22282E"/>
-                </a:solidFill>
-              </a:rPr>
-              <a:t>•  Gestor de identidades: correos segregados (alias/relays), gestor de contraseñas, números virtuales.</a:t>
-            </a:r>
-          </a:p>
-          <a:p>
-            <a:pPr>
-              <a:spcAft>
-                <a:spcPts val="600"/>
-              </a:spcAft>
-            </a:pPr>
-            <a:r>
-              <a:rPr sz="1500">
-                <a:solidFill>
-                  <a:srgbClr val="22282E"/>
-                </a:solidFill>
-              </a:rPr>
-              <a:t>•  Limpieza de metadatos: exiftool, mat2.</a:t>
-            </a:r>
-          </a:p>
-          <a:p>
-            <a:pPr>
-              <a:spcAft>
-                <a:spcPts val="600"/>
-              </a:spcAft>
-            </a:pPr>
-            <a:r>
-              <a:rPr sz="1500">
-                <a:solidFill>
-                  <a:srgbClr val="22282E"/>
-                </a:solidFill>
-              </a:rPr>
-              <a:t>•  Recordatorio: herramienta ≠ anonimato; la OPSEC se rompe por comportamiento (reutilizar alias, mezclar cuentas).</a:t>
+              <a:t>•  Término — Definición útil</a:t>
+            </a:r>
+          </a:p>
+          <a:p>
+            <a:pPr>
+              <a:spcAft>
+                <a:spcPts val="600"/>
+              </a:spcAft>
+            </a:pPr>
+            <a:r>
+              <a:rPr sz="1500">
+                <a:solidFill>
+                  <a:srgbClr val="22282E"/>
+                </a:solidFill>
+              </a:rPr>
+              <a:t>•  Modelo de amenaza — Relación entre activos, adversarios, capacidades y consecuencias.</a:t>
+            </a:r>
+          </a:p>
+          <a:p>
+            <a:pPr>
+              <a:spcAft>
+                <a:spcPts val="600"/>
+              </a:spcAft>
+            </a:pPr>
+            <a:r>
+              <a:rPr sz="1500">
+                <a:solidFill>
+                  <a:srgbClr val="22282E"/>
+                </a:solidFill>
+              </a:rPr>
+              <a:t>•  Seudonimato — Uso de identidad alternativa que puede mantener continuidad.</a:t>
+            </a:r>
+          </a:p>
+          <a:p>
+            <a:pPr>
+              <a:spcAft>
+                <a:spcPts val="600"/>
+              </a:spcAft>
+            </a:pPr>
+            <a:r>
+              <a:rPr sz="1500">
+                <a:solidFill>
+                  <a:srgbClr val="22282E"/>
+                </a:solidFill>
+              </a:rPr>
+              <a:t>•  Anonimato — Dificultad de vincular una acción con una identidad dentro de un conjunto.</a:t>
+            </a:r>
+          </a:p>
+          <a:p>
+            <a:pPr>
+              <a:spcAft>
+                <a:spcPts val="600"/>
+              </a:spcAft>
+            </a:pPr>
+            <a:r>
+              <a:rPr sz="1500">
+                <a:solidFill>
+                  <a:srgbClr val="22282E"/>
+                </a:solidFill>
+              </a:rPr>
+              <a:t>•  Compartimentación — Separación consistente para limitar correlación e impacto.</a:t>
+            </a:r>
+          </a:p>
+          <a:p>
+            <a:pPr>
+              <a:spcAft>
+                <a:spcPts val="600"/>
+              </a:spcAft>
+            </a:pPr>
+            <a:r>
+              <a:rPr sz="1500">
+                <a:solidFill>
+                  <a:srgbClr val="22282E"/>
+                </a:solidFill>
+              </a:rPr>
+              <a:t>•  Metadato — Información sobre creación, comunicación o contexto, distinta del contenido principal.</a:t>
             </a:r>
           </a:p>
         </p:txBody>
@@ -4749,7 +5320,7 @@
                   <a:srgbClr val="0B3D2E"/>
                 </a:solidFill>
               </a:rPr>
-              <a:t>🧪 Laboratorio guiado (sobre ti mismo)</a:t>
+              <a:t>✅ Criterio de dominio</a:t>
             </a:r>
           </a:p>
         </p:txBody>
@@ -4787,97 +5358,7 @@
                   <a:srgbClr val="22282E"/>
                 </a:solidFill>
               </a:rPr>
-              <a:t>•  Redacta tu modelo de amenaza: qué activos proteges, posibles adversarios y su capacidad.</a:t>
-            </a:r>
-          </a:p>
-          <a:p>
-            <a:pPr>
-              <a:spcAft>
-                <a:spcPts val="600"/>
-              </a:spcAft>
-            </a:pPr>
-            <a:r>
-              <a:rPr sz="1500">
-                <a:solidFill>
-                  <a:srgbClr val="22282E"/>
-                </a:solidFill>
-              </a:rPr>
-              <a:t>•  Diseña un esquema de compartimentación: identidad personal, profesional y de investigación separadas.</a:t>
-            </a:r>
-          </a:p>
-          <a:p>
-            <a:pPr>
-              <a:spcAft>
-                <a:spcPts val="600"/>
-              </a:spcAft>
-            </a:pPr>
-            <a:r>
-              <a:rPr sz="1500">
-                <a:solidFill>
-                  <a:srgbClr val="22282E"/>
-                </a:solidFill>
-              </a:rPr>
-              <a:t>•  Audita tu huella (reutiliza la Clase 249) y crea una lista de solicitudes de eliminación a servicios/brokers.</a:t>
-            </a:r>
-          </a:p>
-          <a:p>
-            <a:pPr>
-              <a:spcAft>
-                <a:spcPts val="600"/>
-              </a:spcAft>
-            </a:pPr>
-            <a:r>
-              <a:rPr sz="1500">
-                <a:solidFill>
-                  <a:srgbClr val="22282E"/>
-                </a:solidFill>
-              </a:rPr>
-              <a:t>•  Crea correos segregados con relays/alias y contraseñas únicas por identidad.</a:t>
-            </a:r>
-          </a:p>
-          <a:p>
-            <a:pPr>
-              <a:spcAft>
-                <a:spcPts val="600"/>
-              </a:spcAft>
-            </a:pPr>
-            <a:r>
-              <a:rPr sz="1500">
-                <a:solidFill>
-                  <a:srgbClr val="22282E"/>
-                </a:solidFill>
-              </a:rPr>
-              <a:t>•  Instala Tor Browser y comprueba tu IP en un servicio de "what is my IP" antes y después.</a:t>
-            </a:r>
-          </a:p>
-          <a:p>
-            <a:pPr>
-              <a:spcAft>
-                <a:spcPts val="600"/>
-              </a:spcAft>
-            </a:pPr>
-            <a:r>
-              <a:rPr sz="1500">
-                <a:solidFill>
-                  <a:srgbClr val="22282E"/>
-                </a:solidFill>
-              </a:rPr>
-              <a:t>•  Prepara un USB de Tails y arráncalo en una VM/equipo de prueba; verifica que no deja rastros.</a:t>
-            </a:r>
-          </a:p>
-          <a:p>
-            <a:pPr>
-              <a:spcAft>
-                <a:spcPts val="600"/>
-              </a:spcAft>
-            </a:pPr>
-            <a:r>
-              <a:rPr sz="1500">
-                <a:solidFill>
-                  <a:srgbClr val="22282E"/>
-                </a:solidFill>
-              </a:rPr>
-              <a:t>•  Limpia metadatos de un documento con mat2 archivo.pdf y compara antes/después.</a:t>
+              <a:t>•  Existe dominio cuando el alumno diseña OPSEC para un adversario concreto, identifica enlaces entre capas, prueba fugas, explica límites de Tor y VPN y protege tanto al investigador como a terceros…</a:t>
             </a:r>
           </a:p>
         </p:txBody>
@@ -4928,7 +5409,7 @@
                   <a:srgbClr val="0B3D2E"/>
                 </a:solidFill>
               </a:rPr>
-              <a:t>✍️ Ejercicios</a:t>
+              <a:t>📖 Definiciones y características</a:t>
             </a:r>
           </a:p>
         </p:txBody>
@@ -4966,82 +5447,97 @@
                   <a:srgbClr val="22282E"/>
                 </a:solidFill>
               </a:rPr>
-              <a:t>•  Escribe tu modelo de amenaza en una página, con adversarios y esfuerzo estimado.</a:t>
-            </a:r>
-          </a:p>
-          <a:p>
-            <a:pPr>
-              <a:spcAft>
-                <a:spcPts val="600"/>
-              </a:spcAft>
-            </a:pPr>
-            <a:r>
-              <a:rPr sz="1500">
-                <a:solidFill>
-                  <a:srgbClr val="22282E"/>
-                </a:solidFill>
-              </a:rPr>
-              <a:t>•  Explica un error típico que anula el anonimato de Tor (p. ej. loguearte en tu cuenta real).</a:t>
-            </a:r>
-          </a:p>
-          <a:p>
-            <a:pPr>
-              <a:spcAft>
-                <a:spcPts val="600"/>
-              </a:spcAft>
-            </a:pPr>
-            <a:r>
-              <a:rPr sz="1500">
-                <a:solidFill>
-                  <a:srgbClr val="22282E"/>
-                </a:solidFill>
-              </a:rPr>
-              <a:t>•  Compara Tor vs. VPN vs. Tor sobre VPN y cuándo usar cada uno.</a:t>
-            </a:r>
-          </a:p>
-          <a:p>
-            <a:pPr>
-              <a:spcAft>
-                <a:spcPts val="600"/>
-              </a:spcAft>
-            </a:pPr>
-            <a:r>
-              <a:rPr sz="1500">
-                <a:solidFill>
-                  <a:srgbClr val="22282E"/>
-                </a:solidFill>
-              </a:rPr>
-              <a:t>•  Diseña un esquema de tres identidades compartimentadas con reglas de no-cruce.</a:t>
-            </a:r>
-          </a:p>
-          <a:p>
-            <a:pPr>
-              <a:spcAft>
-                <a:spcPts val="600"/>
-              </a:spcAft>
-            </a:pPr>
-            <a:r>
-              <a:rPr sz="1500">
-                <a:solidFill>
-                  <a:srgbClr val="22282E"/>
-                </a:solidFill>
-              </a:rPr>
-              <a:t>•  Redacta 5 solicitudes de eliminación a data brokers de tu región.</a:t>
-            </a:r>
-          </a:p>
-          <a:p>
-            <a:pPr>
-              <a:spcAft>
-                <a:spcPts val="600"/>
-              </a:spcAft>
-            </a:pPr>
-            <a:r>
-              <a:rPr sz="1500">
-                <a:solidFill>
-                  <a:srgbClr val="22282E"/>
-                </a:solidFill>
-              </a:rPr>
-              <a:t>•  Enumera 5 hábitos que rompen la OPSEC aunque uses buenas herramientas.</a:t>
+              <a:t>•  OPSEC: proceso de proteger información sensible identificando qué revelas y a quién. Característica: es disciplina continua, no una herramienta.</a:t>
+            </a:r>
+          </a:p>
+          <a:p>
+            <a:pPr>
+              <a:spcAft>
+                <a:spcPts val="600"/>
+              </a:spcAft>
+            </a:pPr>
+            <a:r>
+              <a:rPr sz="1500">
+                <a:solidFill>
+                  <a:srgbClr val="22282E"/>
+                </a:solidFill>
+              </a:rPr>
+              <a:t>•  Modelo de amenaza: análisis de qué proteges, de quién y con qué esfuerzo. Característica: sin él, la OPSEC es aleatoria.</a:t>
+            </a:r>
+          </a:p>
+          <a:p>
+            <a:pPr>
+              <a:spcAft>
+                <a:spcPts val="600"/>
+              </a:spcAft>
+            </a:pPr>
+            <a:r>
+              <a:rPr sz="1500">
+                <a:solidFill>
+                  <a:srgbClr val="22282E"/>
+                </a:solidFill>
+              </a:rPr>
+              <a:t>•  Compartimentación: separar identidades/actividades en silos. Característica: limita el daño de una filtración.</a:t>
+            </a:r>
+          </a:p>
+          <a:p>
+            <a:pPr>
+              <a:spcAft>
+                <a:spcPts val="600"/>
+              </a:spcAft>
+            </a:pPr>
+            <a:r>
+              <a:rPr sz="1500">
+                <a:solidFill>
+                  <a:srgbClr val="22282E"/>
+                </a:solidFill>
+              </a:rPr>
+              <a:t>•  Tor: red de anonimato por enrutamiento en capas. Característica: oculta la IP, pero no protege de errores de OPSEC del usuario.</a:t>
+            </a:r>
+          </a:p>
+          <a:p>
+            <a:pPr>
+              <a:spcAft>
+                <a:spcPts val="600"/>
+              </a:spcAft>
+            </a:pPr>
+            <a:r>
+              <a:rPr sz="1500">
+                <a:solidFill>
+                  <a:srgbClr val="22282E"/>
+                </a:solidFill>
+              </a:rPr>
+              <a:t>•  VPN: túnel cifrado hacia un proveedor. Característica: cambia la confianza, no elimina la atribución; el proveedor te ve.</a:t>
+            </a:r>
+          </a:p>
+          <a:p>
+            <a:pPr>
+              <a:spcAft>
+                <a:spcPts val="600"/>
+              </a:spcAft>
+            </a:pPr>
+            <a:r>
+              <a:rPr sz="1500">
+                <a:solidFill>
+                  <a:srgbClr val="22282E"/>
+                </a:solidFill>
+              </a:rPr>
+              <a:t>•  Tails: sistema live amnésico que enruta por Tor. Característica: no deja rastros en el equipo.</a:t>
+            </a:r>
+          </a:p>
+          <a:p>
+            <a:pPr>
+              <a:spcAft>
+                <a:spcPts val="600"/>
+              </a:spcAft>
+            </a:pPr>
+            <a:r>
+              <a:rPr sz="1500">
+                <a:solidFill>
+                  <a:srgbClr val="22282E"/>
+                </a:solidFill>
+              </a:rPr>
+              <a:t>•  Huella digital: conjunto de datos tuyos accesibles. Característica: se reduce, rara vez se elimina del todo.</a:t>
             </a:r>
           </a:p>
         </p:txBody>
